--- a/collateral/render/playbook-brand-deck.pptx
+++ b/collateral/render/playbook-brand-deck.pptx
@@ -1889,7 +1889,7 @@
             <a:avLst/>
           </a:prstGeom>
           <a:solidFill>
-            <a:srgbClr val="00D4AA"/>
+            <a:srgbClr val="10B981"/>
           </a:solidFill>
           <a:ln/>
         </p:spPr>
@@ -1929,7 +1929,7 @@
             <a:avLst/>
           </a:prstGeom>
           <a:solidFill>
-            <a:srgbClr val="00A888"/>
+            <a:srgbClr val="047857"/>
           </a:solidFill>
           <a:ln/>
         </p:spPr>
@@ -1967,7 +1967,7 @@
                 <a:ea typeface="Inter" pitchFamily="34" charset="-122"/>
                 <a:cs typeface="Inter" pitchFamily="34" charset="-120"/>
               </a:rPr>
-              <a:t>Playbook</a:t>
+              <a:t>Playbook RG</a:t>
             </a:r>
             <a:endParaRPr lang="en-US" sz="6400" dirty="0"/>
           </a:p>
@@ -2000,7 +2000,7 @@
             <a:r>
               <a:rPr lang="en-US" sz="2400" dirty="0">
                 <a:solidFill>
-                  <a:srgbClr val="00D4AA"/>
+                  <a:srgbClr val="10B981"/>
                 </a:solidFill>
                 <a:latin typeface="Inter" pitchFamily="34" charset="0"/>
                 <a:ea typeface="Inter" pitchFamily="34" charset="-122"/>
@@ -2196,7 +2196,7 @@
             <a:avLst/>
           </a:prstGeom>
           <a:solidFill>
-            <a:srgbClr val="00D4AA"/>
+            <a:srgbClr val="10B981"/>
           </a:solidFill>
           <a:ln/>
         </p:spPr>
@@ -2236,7 +2236,7 @@
             <a:avLst/>
           </a:prstGeom>
           <a:solidFill>
-            <a:srgbClr val="00A888"/>
+            <a:srgbClr val="047857"/>
           </a:solidFill>
           <a:ln/>
         </p:spPr>
@@ -2465,7 +2465,7 @@
             <a:r>
               <a:rPr lang="en-US" sz="1000" dirty="0">
                 <a:solidFill>
-                  <a:srgbClr val="00D4AA"/>
+                  <a:srgbClr val="10B981"/>
                 </a:solidFill>
                 <a:latin typeface="Source Code Pro" pitchFamily="34" charset="0"/>
                 <a:ea typeface="Source Code Pro" pitchFamily="34" charset="-122"/>
@@ -2685,7 +2685,7 @@
             <a:r>
               <a:rPr lang="en-US" sz="1000" dirty="0">
                 <a:solidFill>
-                  <a:srgbClr val="00D4AA"/>
+                  <a:srgbClr val="10B981"/>
                 </a:solidFill>
                 <a:latin typeface="Source Code Pro" pitchFamily="34" charset="0"/>
                 <a:ea typeface="Source Code Pro" pitchFamily="34" charset="-122"/>
@@ -2905,7 +2905,7 @@
             <a:r>
               <a:rPr lang="en-US" sz="1000" dirty="0">
                 <a:solidFill>
-                  <a:srgbClr val="00D4AA"/>
+                  <a:srgbClr val="10B981"/>
                 </a:solidFill>
                 <a:latin typeface="Source Code Pro" pitchFamily="34" charset="0"/>
                 <a:ea typeface="Source Code Pro" pitchFamily="34" charset="-122"/>
@@ -3125,7 +3125,7 @@
             <a:r>
               <a:rPr lang="en-US" sz="1000" dirty="0">
                 <a:solidFill>
-                  <a:srgbClr val="00D4AA"/>
+                  <a:srgbClr val="10B981"/>
                 </a:solidFill>
                 <a:latin typeface="Source Code Pro" pitchFamily="34" charset="0"/>
                 <a:ea typeface="Source Code Pro" pitchFamily="34" charset="-122"/>
@@ -3345,7 +3345,7 @@
             <a:r>
               <a:rPr lang="en-US" sz="1000" dirty="0">
                 <a:solidFill>
-                  <a:srgbClr val="00D4AA"/>
+                  <a:srgbClr val="10B981"/>
                 </a:solidFill>
                 <a:latin typeface="Source Code Pro" pitchFamily="34" charset="0"/>
                 <a:ea typeface="Source Code Pro" pitchFamily="34" charset="-122"/>
@@ -3525,7 +3525,7 @@
             <a:avLst/>
           </a:prstGeom>
           <a:solidFill>
-            <a:srgbClr val="00D4AA"/>
+            <a:srgbClr val="10B981"/>
           </a:solidFill>
           <a:ln/>
         </p:spPr>
@@ -3565,7 +3565,7 @@
             <a:avLst/>
           </a:prstGeom>
           <a:solidFill>
-            <a:srgbClr val="00A888"/>
+            <a:srgbClr val="047857"/>
           </a:solidFill>
           <a:ln/>
         </p:spPr>
@@ -3690,7 +3690,7 @@
             <a:avLst/>
           </a:prstGeom>
           <a:solidFill>
-            <a:srgbClr val="00D4AA"/>
+            <a:srgbClr val="10B981"/>
           </a:solidFill>
           <a:ln/>
         </p:spPr>
@@ -3751,7 +3751,7 @@
             </a:avLst>
           </a:prstGeom>
           <a:solidFill>
-            <a:srgbClr val="00D4AA"/>
+            <a:srgbClr val="10B981"/>
           </a:solidFill>
           <a:ln/>
         </p:spPr>
@@ -4635,7 +4635,7 @@
             <a:r>
               <a:rPr lang="en-US" sz="1300" b="1" dirty="0">
                 <a:solidFill>
-                  <a:srgbClr val="00D4AA"/>
+                  <a:srgbClr val="10B981"/>
                 </a:solidFill>
                 <a:latin typeface="Inter" pitchFamily="34" charset="0"/>
                 <a:ea typeface="Inter" pitchFamily="34" charset="-122"/>
@@ -4948,7 +4948,7 @@
             <a:avLst/>
           </a:prstGeom>
           <a:solidFill>
-            <a:srgbClr val="00D4AA"/>
+            <a:srgbClr val="10B981"/>
           </a:solidFill>
           <a:ln/>
         </p:spPr>
@@ -4988,7 +4988,7 @@
             <a:avLst/>
           </a:prstGeom>
           <a:solidFill>
-            <a:srgbClr val="00A888"/>
+            <a:srgbClr val="047857"/>
           </a:solidFill>
           <a:ln/>
         </p:spPr>
@@ -5047,7 +5047,7 @@
             <a:avLst/>
           </a:prstGeom>
           <a:solidFill>
-            <a:srgbClr val="00D4AA"/>
+            <a:srgbClr val="10B981"/>
           </a:solidFill>
           <a:ln/>
         </p:spPr>
@@ -5243,7 +5243,7 @@
             <a:avLst/>
           </a:prstGeom>
           <a:solidFill>
-            <a:srgbClr val="00D4AA"/>
+            <a:srgbClr val="10B981"/>
           </a:solidFill>
           <a:ln/>
         </p:spPr>
@@ -5439,7 +5439,7 @@
             <a:avLst/>
           </a:prstGeom>
           <a:solidFill>
-            <a:srgbClr val="00D4AA"/>
+            <a:srgbClr val="10B981"/>
           </a:solidFill>
           <a:ln/>
         </p:spPr>
@@ -5635,7 +5635,7 @@
             <a:avLst/>
           </a:prstGeom>
           <a:solidFill>
-            <a:srgbClr val="00D4AA"/>
+            <a:srgbClr val="10B981"/>
           </a:solidFill>
           <a:ln/>
         </p:spPr>
@@ -5807,7 +5807,7 @@
             <a:r>
               <a:rPr lang="en-US" sz="2800" b="1" dirty="0">
                 <a:solidFill>
-                  <a:srgbClr val="00D4AA"/>
+                  <a:srgbClr val="10B981"/>
                 </a:solidFill>
                 <a:latin typeface="Source Code Pro" pitchFamily="34" charset="0"/>
                 <a:ea typeface="Source Code Pro" pitchFamily="34" charset="-122"/>
@@ -6023,7 +6023,7 @@
             <a:avLst/>
           </a:prstGeom>
           <a:solidFill>
-            <a:srgbClr val="00D4AA"/>
+            <a:srgbClr val="10B981"/>
           </a:solidFill>
           <a:ln/>
         </p:spPr>
@@ -6063,7 +6063,7 @@
             <a:avLst/>
           </a:prstGeom>
           <a:solidFill>
-            <a:srgbClr val="00A888"/>
+            <a:srgbClr val="047857"/>
           </a:solidFill>
           <a:ln/>
         </p:spPr>
@@ -6407,7 +6407,7 @@
             <a:r>
               <a:rPr lang="en-US" sz="1300" b="1" dirty="0">
                 <a:solidFill>
-                  <a:srgbClr val="00D4AA"/>
+                  <a:srgbClr val="10B981"/>
                 </a:solidFill>
                 <a:latin typeface="Inter" pitchFamily="34" charset="0"/>
                 <a:ea typeface="Inter" pitchFamily="34" charset="-122"/>
@@ -6743,7 +6743,7 @@
             <a:avLst/>
           </a:prstGeom>
           <a:solidFill>
-            <a:srgbClr val="00D4AA"/>
+            <a:srgbClr val="10B981"/>
           </a:solidFill>
           <a:ln/>
         </p:spPr>
@@ -6783,7 +6783,7 @@
             <a:avLst/>
           </a:prstGeom>
           <a:solidFill>
-            <a:srgbClr val="00A888"/>
+            <a:srgbClr val="047857"/>
           </a:solidFill>
           <a:ln/>
         </p:spPr>
@@ -6864,7 +6864,7 @@
             <a:avLst/>
           </a:prstGeom>
           <a:solidFill>
-            <a:srgbClr val="00D4AA"/>
+            <a:srgbClr val="10B981"/>
           </a:solidFill>
           <a:ln/>
         </p:spPr>
@@ -7110,7 +7110,7 @@
             <a:avLst/>
           </a:prstGeom>
           <a:solidFill>
-            <a:srgbClr val="00D4AA"/>
+            <a:srgbClr val="10B981"/>
           </a:solidFill>
           <a:ln/>
         </p:spPr>
@@ -7302,7 +7302,7 @@
             <a:avLst/>
           </a:prstGeom>
           <a:solidFill>
-            <a:srgbClr val="00D4AA"/>
+            <a:srgbClr val="10B981"/>
           </a:solidFill>
           <a:ln/>
         </p:spPr>
@@ -7342,7 +7342,7 @@
             <a:avLst/>
           </a:prstGeom>
           <a:solidFill>
-            <a:srgbClr val="00A888"/>
+            <a:srgbClr val="047857"/>
           </a:solidFill>
           <a:ln/>
         </p:spPr>
@@ -7464,7 +7464,7 @@
             </a:avLst>
           </a:prstGeom>
           <a:solidFill>
-            <a:srgbClr val="00D4AA"/>
+            <a:srgbClr val="10B981"/>
           </a:solidFill>
           <a:ln/>
         </p:spPr>
@@ -7737,7 +7737,7 @@
             </a:avLst>
           </a:prstGeom>
           <a:solidFill>
-            <a:srgbClr val="00D4AA"/>
+            <a:srgbClr val="10B981"/>
           </a:solidFill>
           <a:ln/>
         </p:spPr>
@@ -8077,7 +8077,7 @@
             <a:avLst/>
           </a:prstGeom>
           <a:solidFill>
-            <a:srgbClr val="00D4AA"/>
+            <a:srgbClr val="10B981"/>
           </a:solidFill>
           <a:ln/>
         </p:spPr>
@@ -8117,7 +8117,7 @@
             <a:avLst/>
           </a:prstGeom>
           <a:solidFill>
-            <a:srgbClr val="00A888"/>
+            <a:srgbClr val="047857"/>
           </a:solidFill>
           <a:ln/>
         </p:spPr>
@@ -8188,13 +8188,13 @@
             <a:r>
               <a:rPr lang="en-US" sz="1300" b="1" dirty="0">
                 <a:solidFill>
-                  <a:srgbClr val="00D4AA"/>
+                  <a:srgbClr val="10B981"/>
                 </a:solidFill>
                 <a:latin typeface="Inter" pitchFamily="34" charset="0"/>
                 <a:ea typeface="Inter" pitchFamily="34" charset="-122"/>
                 <a:cs typeface="Inter" pitchFamily="34" charset="-120"/>
               </a:rPr>
-              <a:t>THE SHARP</a:t>
+              <a:t>PLAYBOOK VOICE</a:t>
             </a:r>
             <a:endParaRPr lang="en-US" sz="1300" dirty="0"/>
           </a:p>
@@ -8627,7 +8627,7 @@
             <a:avLst/>
           </a:prstGeom>
           <a:solidFill>
-            <a:srgbClr val="00D4AA"/>
+            <a:srgbClr val="10B981"/>
           </a:solidFill>
           <a:ln/>
         </p:spPr>
@@ -8659,13 +8659,13 @@
             <a:r>
               <a:rPr lang="en-US" sz="1100" b="1" dirty="0">
                 <a:solidFill>
-                  <a:srgbClr val="00D4AA"/>
+                  <a:srgbClr val="10B981"/>
                 </a:solidFill>
                 <a:latin typeface="Inter" pitchFamily="34" charset="0"/>
                 <a:ea typeface="Inter" pitchFamily="34" charset="-122"/>
                 <a:cs typeface="Inter" pitchFamily="34" charset="-120"/>
               </a:rPr>
-              <a:t>THE SHARP VOICE</a:t>
+              <a:t>PLAYBOOK VOICE</a:t>
             </a:r>
             <a:endParaRPr lang="en-US" sz="1100" dirty="0"/>
           </a:p>
@@ -8828,7 +8828,7 @@
                 <a:ea typeface="Inter" pitchFamily="34" charset="-122"/>
                 <a:cs typeface="Inter" pitchFamily="34" charset="-120"/>
               </a:rPr>
-              <a:t>THE GOOD FRIEND</a:t>
+              <a:t>SUPPORT VOICE</a:t>
             </a:r>
             <a:endParaRPr lang="en-US" sz="1100" dirty="0"/>
           </a:p>
@@ -8870,7 +8870,7 @@
                 <a:ea typeface="Source Sans 3" pitchFamily="34" charset="-122"/>
                 <a:cs typeface="Source Sans 3" pitchFamily="34" charset="-120"/>
               </a:rPr>
-              <a:t>Secondary archetype — warm, supportive.</a:t>
+              <a:t>Warm, supportive register.</a:t>
             </a:r>
             <a:endParaRPr lang="en-US" sz="1400" dirty="0"/>
           </a:p>
@@ -9041,7 +9041,7 @@
             <a:avLst/>
           </a:prstGeom>
           <a:solidFill>
-            <a:srgbClr val="00D4AA"/>
+            <a:srgbClr val="10B981"/>
           </a:solidFill>
           <a:ln/>
         </p:spPr>
@@ -9081,7 +9081,7 @@
             <a:avLst/>
           </a:prstGeom>
           <a:solidFill>
-            <a:srgbClr val="00A888"/>
+            <a:srgbClr val="047857"/>
           </a:solidFill>
           <a:ln/>
         </p:spPr>
@@ -9515,7 +9515,7 @@
             </a:avLst>
           </a:prstGeom>
           <a:solidFill>
-            <a:srgbClr val="00D4AA"/>
+            <a:srgbClr val="10B981"/>
           </a:solidFill>
           <a:ln/>
         </p:spPr>
@@ -9570,7 +9570,7 @@
                 <a:ea typeface="Inter" pitchFamily="34" charset="-122"/>
                 <a:cs typeface="Inter" pitchFamily="34" charset="-120"/>
               </a:rPr>
-              <a:t>Electric Teal</a:t>
+              <a:t>Emerald</a:t>
             </a:r>
             <a:endParaRPr lang="en-US" sz="1200" dirty="0"/>
           </a:p>
@@ -9609,7 +9609,7 @@
                 <a:ea typeface="Source Code Pro" pitchFamily="34" charset="-122"/>
                 <a:cs typeface="Source Code Pro" pitchFamily="34" charset="-120"/>
               </a:rPr>
-              <a:t>#00D4AA</a:t>
+              <a:t>#10B981</a:t>
             </a:r>
             <a:endParaRPr lang="en-US" sz="1400" dirty="0"/>
           </a:p>
@@ -10273,7 +10273,7 @@
             <a:avLst/>
           </a:prstGeom>
           <a:solidFill>
-            <a:srgbClr val="00D4AA"/>
+            <a:srgbClr val="10B981"/>
           </a:solidFill>
           <a:ln/>
         </p:spPr>
@@ -10313,7 +10313,7 @@
             <a:avLst/>
           </a:prstGeom>
           <a:solidFill>
-            <a:srgbClr val="00A888"/>
+            <a:srgbClr val="047857"/>
           </a:solidFill>
           <a:ln/>
         </p:spPr>
@@ -10877,7 +10877,7 @@
             <a:r>
               <a:rPr lang="en-US" sz="2000" dirty="0">
                 <a:solidFill>
-                  <a:srgbClr val="00D4AA"/>
+                  <a:srgbClr val="10B981"/>
                 </a:solidFill>
                 <a:latin typeface="Source Code Pro" pitchFamily="34" charset="0"/>
                 <a:ea typeface="Source Code Pro" pitchFamily="34" charset="-122"/>
@@ -11177,7 +11177,7 @@
             <a:avLst/>
           </a:prstGeom>
           <a:solidFill>
-            <a:srgbClr val="00D4AA"/>
+            <a:srgbClr val="10B981"/>
           </a:solidFill>
           <a:ln/>
         </p:spPr>
@@ -11217,7 +11217,7 @@
             <a:avLst/>
           </a:prstGeom>
           <a:solidFill>
-            <a:srgbClr val="00A888"/>
+            <a:srgbClr val="047857"/>
           </a:solidFill>
           <a:ln/>
         </p:spPr>
@@ -11327,7 +11327,7 @@
             <a:r>
               <a:rPr lang="en-US" sz="1300" b="1" dirty="0">
                 <a:solidFill>
-                  <a:srgbClr val="00D4AA"/>
+                  <a:srgbClr val="10B981"/>
                 </a:solidFill>
                 <a:latin typeface="Inter" pitchFamily="34" charset="0"/>
                 <a:ea typeface="Inter" pitchFamily="34" charset="-122"/>
@@ -12035,7 +12035,7 @@
             <a:avLst/>
           </a:prstGeom>
           <a:solidFill>
-            <a:srgbClr val="00D4AA"/>
+            <a:srgbClr val="10B981"/>
           </a:solidFill>
           <a:ln/>
         </p:spPr>
@@ -12075,7 +12075,7 @@
             <a:avLst/>
           </a:prstGeom>
           <a:solidFill>
-            <a:srgbClr val="00A888"/>
+            <a:srgbClr val="047857"/>
           </a:solidFill>
           <a:ln/>
         </p:spPr>
@@ -12136,7 +12136,7 @@
             </a:avLst>
           </a:prstGeom>
           <a:solidFill>
-            <a:srgbClr val="00D4AA"/>
+            <a:srgbClr val="10B981"/>
           </a:solidFill>
           <a:ln/>
         </p:spPr>
@@ -12353,7 +12353,7 @@
             </a:avLst>
           </a:prstGeom>
           <a:solidFill>
-            <a:srgbClr val="00D4AA"/>
+            <a:srgbClr val="10B981"/>
           </a:solidFill>
           <a:ln/>
         </p:spPr>
@@ -12625,7 +12625,7 @@
             <a:r>
               <a:rPr lang="en-US" sz="1100" b="1" dirty="0">
                 <a:solidFill>
-                  <a:srgbClr val="00D4AA"/>
+                  <a:srgbClr val="10B981"/>
                 </a:solidFill>
                 <a:latin typeface="Inter" pitchFamily="34" charset="0"/>
                 <a:ea typeface="Inter" pitchFamily="34" charset="-122"/>
@@ -12709,7 +12709,7 @@
                 <a:ea typeface="Source Sans 3" pitchFamily="34" charset="-122"/>
                 <a:cs typeface="Source Sans 3" pitchFamily="34" charset="-120"/>
               </a:rPr>
-              <a:t>Odds, myths, how games work. Voice: The Sharp. Engaging, shareable, fun.</a:t>
+              <a:t>Odds, myths, how games work. Voice: Playbook voice. Engaging, shareable, fun.</a:t>
             </a:r>
             <a:endParaRPr lang="en-US" sz="1300" dirty="0"/>
           </a:p>
@@ -12787,7 +12787,7 @@
                 <a:ea typeface="Source Sans 3" pitchFamily="34" charset="-122"/>
                 <a:cs typeface="Source Sans 3" pitchFamily="34" charset="-120"/>
               </a:rPr>
-              <a:t>Helplines, self-assessment, cooling off. Voice: The Good Friend. Warm, non-judgmental.</a:t>
+              <a:t>Helplines, self-assessment, cooling off. Voice: support voice. Warm, non-judgmental.</a:t>
             </a:r>
             <a:endParaRPr lang="en-US" sz="1300" dirty="0"/>
           </a:p>
